--- a/artifacts/semantic_revision_20261022/pptx/Figure13_Semantic.pptx
+++ b/artifacts/semantic_revision_20261022/pptx/Figure13_Semantic.pptx
@@ -3654,7 +3654,7 @@
                     <a:solidFill>
                       <a:srgbClr val="24272A"/>
                     </a:solidFill>
-                    <a:latin typeface="Comic Sans MS"/>
+                    <a:latin typeface="Times New Roman"/>
                     <a:ea typeface="Comic Sans MS"/>
                     <a:cs typeface="Comic Sans MS"/>
                   </a:rPr>
@@ -3744,6 +3744,10 @@
                   <a:round/>
                 </a:ln>
               </p:spPr>
+              <p:txBody xmlns:a="http://schemas.openxmlformats.org/drawingml/2006/main">
+                <a:bodyPr/>
+                <a:p/>
+              </p:txBody>
             </p:sp>
             <p:sp>
               <p:nvSpPr>
@@ -3802,6 +3806,10 @@
                   <a:round/>
                 </a:ln>
               </p:spPr>
+              <p:txBody xmlns:a="http://schemas.openxmlformats.org/drawingml/2006/main">
+                <a:bodyPr/>
+                <a:p/>
+              </p:txBody>
             </p:sp>
             <p:sp>
               <p:nvSpPr>
@@ -3843,6 +3851,10 @@
                   <a:round/>
                 </a:ln>
               </p:spPr>
+              <p:txBody xmlns:a="http://schemas.openxmlformats.org/drawingml/2006/main">
+                <a:bodyPr/>
+                <a:p/>
+              </p:txBody>
             </p:sp>
           </p:grpSp>
           <p:sp>
@@ -3994,7 +4006,7 @@
                     <a:solidFill>
                       <a:srgbClr val="24272A"/>
                     </a:solidFill>
-                    <a:latin typeface="Arial"/>
+                    <a:latin typeface="Times New Roman"/>
                     <a:ea typeface="Arial"/>
                     <a:cs typeface="Arial"/>
                   </a:rPr>
@@ -4152,7 +4164,7 @@
                     <a:solidFill>
                       <a:srgbClr val="626A6F"/>
                     </a:solidFill>
-                    <a:latin typeface="Arial"/>
+                    <a:latin typeface="Times New Roman"/>
                     <a:ea typeface="Arial"/>
                     <a:cs typeface="Arial"/>
                   </a:rPr>
@@ -4192,6 +4204,10 @@
                 <a:round/>
               </a:ln>
             </p:spPr>
+            <p:txBody xmlns:a="http://schemas.openxmlformats.org/drawingml/2006/main">
+              <a:bodyPr/>
+              <a:p/>
+            </p:txBody>
           </p:sp>
           <p:sp>
             <p:nvSpPr>
@@ -4236,6 +4252,10 @@
                 <a:round/>
               </a:ln>
             </p:spPr>
+            <p:txBody xmlns:a="http://schemas.openxmlformats.org/drawingml/2006/main">
+              <a:bodyPr/>
+              <a:p/>
+            </p:txBody>
           </p:sp>
           <p:sp>
             <p:nvSpPr>
@@ -4386,7 +4406,7 @@
                     <a:solidFill>
                       <a:srgbClr val="626A6F"/>
                     </a:solidFill>
-                    <a:latin typeface="Arial"/>
+                    <a:latin typeface="Times New Roman"/>
                     <a:ea typeface="Arial"/>
                     <a:cs typeface="Arial"/>
                   </a:rPr>
@@ -4544,7 +4564,7 @@
                     <a:solidFill>
                       <a:srgbClr val="626A6F"/>
                     </a:solidFill>
-                    <a:latin typeface="Arial"/>
+                    <a:latin typeface="Times New Roman"/>
                     <a:ea typeface="Arial"/>
                     <a:cs typeface="Arial"/>
                   </a:rPr>
@@ -4917,6 +4937,10 @@
                 <a:round/>
               </a:ln>
             </p:spPr>
+            <p:txBody xmlns:a="http://schemas.openxmlformats.org/drawingml/2006/main">
+              <a:bodyPr/>
+              <a:p/>
+            </p:txBody>
           </p:sp>
           <p:sp>
             <p:nvSpPr>
@@ -4964,6 +4988,10 @@
                 <a:round/>
               </a:ln>
             </p:spPr>
+            <p:txBody xmlns:a="http://schemas.openxmlformats.org/drawingml/2006/main">
+              <a:bodyPr/>
+              <a:p/>
+            </p:txBody>
           </p:sp>
           <p:sp>
             <p:nvSpPr>
@@ -5114,7 +5142,7 @@
                     <a:solidFill>
                       <a:srgbClr val="626A6F"/>
                     </a:solidFill>
-                    <a:latin typeface="Arial"/>
+                    <a:latin typeface="Times New Roman"/>
                     <a:ea typeface="Arial"/>
                     <a:cs typeface="Arial"/>
                   </a:rPr>
@@ -5169,6 +5197,10 @@
                 <a:round/>
               </a:ln>
             </p:spPr>
+            <p:txBody xmlns:a="http://schemas.openxmlformats.org/drawingml/2006/main">
+              <a:bodyPr/>
+              <a:p/>
+            </p:txBody>
           </p:sp>
           <p:sp>
             <p:nvSpPr>
@@ -5319,7 +5351,7 @@
                     <a:solidFill>
                       <a:srgbClr val="B76C4D"/>
                     </a:solidFill>
-                    <a:latin typeface="Arial"/>
+                    <a:latin typeface="Times New Roman"/>
                     <a:ea typeface="Arial"/>
                     <a:cs typeface="Arial"/>
                   </a:rPr>
@@ -5374,6 +5406,10 @@
                 <a:round/>
               </a:ln>
             </p:spPr>
+            <p:txBody xmlns:a="http://schemas.openxmlformats.org/drawingml/2006/main">
+              <a:bodyPr/>
+              <a:p/>
+            </p:txBody>
           </p:sp>
           <p:sp>
             <p:nvSpPr>
@@ -5524,7 +5560,7 @@
                     <a:solidFill>
                       <a:srgbClr val="626A6F"/>
                     </a:solidFill>
-                    <a:latin typeface="Arial"/>
+                    <a:latin typeface="Times New Roman"/>
                     <a:ea typeface="Arial"/>
                     <a:cs typeface="Arial"/>
                   </a:rPr>
@@ -5682,7 +5718,7 @@
                     <a:solidFill>
                       <a:srgbClr val="626A6F"/>
                     </a:solidFill>
-                    <a:latin typeface="Arial"/>
+                    <a:latin typeface="Times New Roman"/>
                     <a:ea typeface="Arial"/>
                     <a:cs typeface="Arial"/>
                   </a:rPr>
@@ -5855,7 +5891,7 @@
                     <a:solidFill>
                       <a:srgbClr val="24272A"/>
                     </a:solidFill>
-                    <a:latin typeface="Comic Sans MS"/>
+                    <a:latin typeface="Times New Roman"/>
                     <a:ea typeface="Comic Sans MS"/>
                     <a:cs typeface="Comic Sans MS"/>
                   </a:rPr>
@@ -5945,6 +5981,10 @@
                   <a:round/>
                 </a:ln>
               </p:spPr>
+              <p:txBody xmlns:a="http://schemas.openxmlformats.org/drawingml/2006/main">
+                <a:bodyPr/>
+                <a:p/>
+              </p:txBody>
             </p:sp>
             <p:sp>
               <p:nvSpPr>
@@ -6022,6 +6062,10 @@
                   <a:round/>
                 </a:ln>
               </p:spPr>
+              <p:txBody xmlns:a="http://schemas.openxmlformats.org/drawingml/2006/main">
+                <a:bodyPr/>
+                <a:p/>
+              </p:txBody>
             </p:sp>
             <p:sp>
               <p:nvSpPr>
@@ -6090,6 +6134,10 @@
                   <a:round/>
                 </a:ln>
               </p:spPr>
+              <p:txBody xmlns:a="http://schemas.openxmlformats.org/drawingml/2006/main">
+                <a:bodyPr/>
+                <a:p/>
+              </p:txBody>
             </p:sp>
           </p:grpSp>
           <p:sp>
@@ -6241,7 +6289,7 @@
                     <a:solidFill>
                       <a:srgbClr val="24272A"/>
                     </a:solidFill>
-                    <a:latin typeface="Arial"/>
+                    <a:latin typeface="Times New Roman"/>
                     <a:ea typeface="Arial"/>
                     <a:cs typeface="Arial"/>
                   </a:rPr>
@@ -6399,7 +6447,7 @@
                     <a:solidFill>
                       <a:srgbClr val="24272A"/>
                     </a:solidFill>
-                    <a:latin typeface="Arial"/>
+                    <a:latin typeface="Times New Roman"/>
                     <a:ea typeface="Arial"/>
                     <a:cs typeface="Arial"/>
                   </a:rPr>
@@ -6445,6 +6493,10 @@
               <a:effectRef xmlns:a="http://schemas.openxmlformats.org/drawingml/2006/main" idx="10"/>
               <a:fontRef xmlns:a="http://schemas.openxmlformats.org/drawingml/2006/main" idx="major"/>
             </p:style>
+            <p:txBody xmlns:a="http://schemas.openxmlformats.org/drawingml/2006/main">
+              <a:bodyPr/>
+              <a:p/>
+            </p:txBody>
           </p:sp>
           <p:grpSp>
             <p:nvGrpSpPr>
@@ -6513,6 +6565,10 @@
                   <a:round/>
                 </a:ln>
               </p:spPr>
+              <p:txBody xmlns:a="http://schemas.openxmlformats.org/drawingml/2006/main">
+                <a:bodyPr/>
+                <a:p/>
+              </p:txBody>
             </p:sp>
             <p:sp>
               <p:nvSpPr>
@@ -6567,6 +6623,10 @@
                   <a:round/>
                 </a:ln>
               </p:spPr>
+              <p:txBody xmlns:a="http://schemas.openxmlformats.org/drawingml/2006/main">
+                <a:bodyPr/>
+                <a:p/>
+              </p:txBody>
             </p:sp>
             <p:sp>
               <p:nvSpPr>
@@ -6621,6 +6681,10 @@
                   <a:round/>
                 </a:ln>
               </p:spPr>
+              <p:txBody xmlns:a="http://schemas.openxmlformats.org/drawingml/2006/main">
+                <a:bodyPr/>
+                <a:p/>
+              </p:txBody>
             </p:sp>
             <p:sp>
               <p:nvSpPr>
@@ -6675,6 +6739,10 @@
                   <a:round/>
                 </a:ln>
               </p:spPr>
+              <p:txBody xmlns:a="http://schemas.openxmlformats.org/drawingml/2006/main">
+                <a:bodyPr/>
+                <a:p/>
+              </p:txBody>
             </p:sp>
           </p:grpSp>
           <p:sp>
@@ -6826,7 +6894,7 @@
                     <a:solidFill>
                       <a:srgbClr val="24272A"/>
                     </a:solidFill>
-                    <a:latin typeface="Arial"/>
+                    <a:latin typeface="Times New Roman"/>
                     <a:ea typeface="Arial"/>
                     <a:cs typeface="Arial"/>
                   </a:rPr>
@@ -6984,7 +7052,7 @@
                     <a:solidFill>
                       <a:srgbClr val="24272A"/>
                     </a:solidFill>
-                    <a:latin typeface="Arial"/>
+                    <a:latin typeface="Times New Roman"/>
                     <a:ea typeface="Arial"/>
                     <a:cs typeface="Arial"/>
                   </a:rPr>
@@ -7039,6 +7107,10 @@
               <a:effectRef xmlns:a="http://schemas.openxmlformats.org/drawingml/2006/main" idx="11"/>
               <a:fontRef xmlns:a="http://schemas.openxmlformats.org/drawingml/2006/main" idx="major"/>
             </p:style>
+            <p:txBody xmlns:a="http://schemas.openxmlformats.org/drawingml/2006/main">
+              <a:bodyPr/>
+              <a:p/>
+            </p:txBody>
           </p:sp>
           <p:sp>
             <p:nvSpPr>
@@ -7086,6 +7158,10 @@
                 <a:round/>
               </a:ln>
             </p:spPr>
+            <p:txBody xmlns:a="http://schemas.openxmlformats.org/drawingml/2006/main">
+              <a:bodyPr/>
+              <a:p/>
+            </p:txBody>
           </p:sp>
           <p:sp>
             <p:nvSpPr>
@@ -7124,6 +7200,10 @@
               <a:effectRef xmlns:a="http://schemas.openxmlformats.org/drawingml/2006/main" idx="10"/>
               <a:fontRef xmlns:a="http://schemas.openxmlformats.org/drawingml/2006/main" idx="major"/>
             </p:style>
+            <p:txBody xmlns:a="http://schemas.openxmlformats.org/drawingml/2006/main">
+              <a:bodyPr/>
+              <a:p/>
+            </p:txBody>
           </p:sp>
           <p:grpSp>
             <p:nvGrpSpPr>
@@ -7204,6 +7284,10 @@
                   <a:round/>
                 </a:ln>
               </p:spPr>
+              <p:txBody xmlns:a="http://schemas.openxmlformats.org/drawingml/2006/main">
+                <a:bodyPr/>
+                <a:p/>
+              </p:txBody>
             </p:sp>
             <p:sp>
               <p:nvSpPr>
@@ -7297,6 +7381,10 @@
                   <a:round/>
                 </a:ln>
               </p:spPr>
+              <p:txBody xmlns:a="http://schemas.openxmlformats.org/drawingml/2006/main">
+                <a:bodyPr/>
+                <a:p/>
+              </p:txBody>
             </p:sp>
             <p:sp>
               <p:nvSpPr>
@@ -7338,6 +7426,10 @@
                   <a:round/>
                 </a:ln>
               </p:spPr>
+              <p:txBody xmlns:a="http://schemas.openxmlformats.org/drawingml/2006/main">
+                <a:bodyPr/>
+                <a:p/>
+              </p:txBody>
             </p:sp>
             <p:sp>
               <p:nvSpPr>
@@ -7379,6 +7471,10 @@
                   <a:round/>
                 </a:ln>
               </p:spPr>
+              <p:txBody xmlns:a="http://schemas.openxmlformats.org/drawingml/2006/main">
+                <a:bodyPr/>
+                <a:p/>
+              </p:txBody>
             </p:sp>
             <p:sp>
               <p:nvSpPr>
@@ -7420,6 +7516,10 @@
                   <a:round/>
                 </a:ln>
               </p:spPr>
+              <p:txBody xmlns:a="http://schemas.openxmlformats.org/drawingml/2006/main">
+                <a:bodyPr/>
+                <a:p/>
+              </p:txBody>
             </p:sp>
             <p:sp>
               <p:nvSpPr>
@@ -7461,6 +7561,10 @@
                   <a:round/>
                 </a:ln>
               </p:spPr>
+              <p:txBody xmlns:a="http://schemas.openxmlformats.org/drawingml/2006/main">
+                <a:bodyPr/>
+                <a:p/>
+              </p:txBody>
             </p:sp>
           </p:grpSp>
           <p:sp>
@@ -7612,7 +7716,7 @@
                     <a:solidFill>
                       <a:srgbClr val="24272A"/>
                     </a:solidFill>
-                    <a:latin typeface="Arial"/>
+                    <a:latin typeface="Times New Roman"/>
                     <a:ea typeface="Arial"/>
                     <a:cs typeface="Arial"/>
                   </a:rPr>
@@ -7770,7 +7874,7 @@
                     <a:solidFill>
                       <a:srgbClr val="24272A"/>
                     </a:solidFill>
-                    <a:latin typeface="Arial"/>
+                    <a:latin typeface="Times New Roman"/>
                     <a:ea typeface="Arial"/>
                     <a:cs typeface="Arial"/>
                   </a:rPr>
@@ -7943,7 +8047,7 @@
                     <a:solidFill>
                       <a:srgbClr val="24272A"/>
                     </a:solidFill>
-                    <a:latin typeface="Comic Sans MS"/>
+                    <a:latin typeface="Times New Roman"/>
                     <a:ea typeface="Comic Sans MS"/>
                     <a:cs typeface="Comic Sans MS"/>
                   </a:rPr>
@@ -8006,6 +8110,10 @@
                   <a:round/>
                 </a:ln>
               </p:spPr>
+              <p:txBody xmlns:a="http://schemas.openxmlformats.org/drawingml/2006/main">
+                <a:bodyPr/>
+                <a:p/>
+              </p:txBody>
             </p:sp>
             <p:sp>
               <p:nvSpPr>
@@ -8047,6 +8155,10 @@
                   <a:round/>
                 </a:ln>
               </p:spPr>
+              <p:txBody xmlns:a="http://schemas.openxmlformats.org/drawingml/2006/main">
+                <a:bodyPr/>
+                <a:p/>
+              </p:txBody>
             </p:sp>
             <p:sp>
               <p:nvSpPr>
@@ -8088,6 +8200,10 @@
                   <a:round/>
                 </a:ln>
               </p:spPr>
+              <p:txBody xmlns:a="http://schemas.openxmlformats.org/drawingml/2006/main">
+                <a:bodyPr/>
+                <a:p/>
+              </p:txBody>
             </p:sp>
             <p:sp>
               <p:nvSpPr>
@@ -8132,6 +8248,10 @@
                   <a:round/>
                 </a:ln>
               </p:spPr>
+              <p:txBody xmlns:a="http://schemas.openxmlformats.org/drawingml/2006/main">
+                <a:bodyPr/>
+                <a:p/>
+              </p:txBody>
             </p:sp>
           </p:grpSp>
           <p:sp>
@@ -8283,7 +8403,7 @@
                     <a:solidFill>
                       <a:srgbClr val="24272A"/>
                     </a:solidFill>
-                    <a:latin typeface="Arial"/>
+                    <a:latin typeface="Times New Roman"/>
                     <a:ea typeface="Arial"/>
                     <a:cs typeface="Arial"/>
                   </a:rPr>
@@ -8335,6 +8455,10 @@
                 <a:round/>
               </a:ln>
             </p:spPr>
+            <p:txBody xmlns:a="http://schemas.openxmlformats.org/drawingml/2006/main">
+              <a:bodyPr/>
+              <a:p/>
+            </p:txBody>
           </p:sp>
           <p:sp>
             <p:nvSpPr>
@@ -8485,7 +8609,7 @@
                     <a:solidFill>
                       <a:srgbClr val="24272A"/>
                     </a:solidFill>
-                    <a:latin typeface="Arial"/>
+                    <a:latin typeface="Times New Roman"/>
                     <a:ea typeface="Arial"/>
                     <a:cs typeface="Arial"/>
                   </a:rPr>
@@ -8537,6 +8661,10 @@
                 <a:round/>
               </a:ln>
             </p:spPr>
+            <p:txBody xmlns:a="http://schemas.openxmlformats.org/drawingml/2006/main">
+              <a:bodyPr/>
+              <a:p/>
+            </p:txBody>
           </p:sp>
           <p:sp>
             <p:nvSpPr>
@@ -8687,7 +8815,7 @@
                     <a:solidFill>
                       <a:srgbClr val="24272A"/>
                     </a:solidFill>
-                    <a:latin typeface="Arial"/>
+                    <a:latin typeface="Times New Roman"/>
                     <a:ea typeface="Arial"/>
                     <a:cs typeface="Arial"/>
                   </a:rPr>
@@ -8736,6 +8864,10 @@
                 <a:round/>
               </a:ln>
             </p:spPr>
+            <p:txBody xmlns:a="http://schemas.openxmlformats.org/drawingml/2006/main">
+              <a:bodyPr/>
+              <a:p/>
+            </p:txBody>
           </p:sp>
           <p:sp>
             <p:nvSpPr>
@@ -8886,7 +9018,7 @@
                     <a:solidFill>
                       <a:srgbClr val="328372"/>
                     </a:solidFill>
-                    <a:latin typeface="Arial"/>
+                    <a:latin typeface="Times New Roman"/>
                     <a:ea typeface="Arial"/>
                     <a:cs typeface="Arial"/>
                   </a:rPr>
@@ -8941,6 +9073,10 @@
               <a:effectRef xmlns:a="http://schemas.openxmlformats.org/drawingml/2006/main" idx="11"/>
               <a:fontRef xmlns:a="http://schemas.openxmlformats.org/drawingml/2006/main" idx="major"/>
             </p:style>
+            <p:txBody xmlns:a="http://schemas.openxmlformats.org/drawingml/2006/main">
+              <a:bodyPr/>
+              <a:p/>
+            </p:txBody>
           </p:sp>
           <p:sp>
             <p:nvSpPr>
@@ -8988,6 +9124,10 @@
                 <a:round/>
               </a:ln>
             </p:spPr>
+            <p:txBody xmlns:a="http://schemas.openxmlformats.org/drawingml/2006/main">
+              <a:bodyPr/>
+              <a:p/>
+            </p:txBody>
           </p:sp>
           <p:sp>
             <p:nvSpPr>
@@ -9026,6 +9166,10 @@
               <a:effectRef xmlns:a="http://schemas.openxmlformats.org/drawingml/2006/main" idx="10"/>
               <a:fontRef xmlns:a="http://schemas.openxmlformats.org/drawingml/2006/main" idx="major"/>
             </p:style>
+            <p:txBody xmlns:a="http://schemas.openxmlformats.org/drawingml/2006/main">
+              <a:bodyPr/>
+              <a:p/>
+            </p:txBody>
           </p:sp>
           <p:grpSp>
             <p:nvGrpSpPr>
@@ -9108,6 +9252,10 @@
                   <a:round/>
                 </a:ln>
               </p:spPr>
+              <p:txBody xmlns:a="http://schemas.openxmlformats.org/drawingml/2006/main">
+                <a:bodyPr/>
+                <a:p/>
+              </p:txBody>
             </p:sp>
             <p:sp>
               <p:nvSpPr>
@@ -9152,6 +9300,10 @@
                   <a:round/>
                 </a:ln>
               </p:spPr>
+              <p:txBody xmlns:a="http://schemas.openxmlformats.org/drawingml/2006/main">
+                <a:bodyPr/>
+                <a:p/>
+              </p:txBody>
             </p:sp>
           </p:grpSp>
           <p:sp>
@@ -9303,7 +9455,7 @@
                     <a:solidFill>
                       <a:srgbClr val="328372"/>
                     </a:solidFill>
-                    <a:latin typeface="Arial"/>
+                    <a:latin typeface="Times New Roman"/>
                     <a:ea typeface="Arial"/>
                     <a:cs typeface="Arial"/>
                   </a:rPr>
@@ -9373,6 +9525,10 @@
               <a:effectRef xmlns:a="http://schemas.openxmlformats.org/drawingml/2006/main" idx="11"/>
               <a:fontRef xmlns:a="http://schemas.openxmlformats.org/drawingml/2006/main" idx="major"/>
             </p:style>
+            <p:txBody xmlns:a="http://schemas.openxmlformats.org/drawingml/2006/main">
+              <a:bodyPr/>
+              <a:p/>
+            </p:txBody>
           </p:sp>
           <p:sp>
             <p:nvSpPr>
@@ -9420,6 +9576,10 @@
                 <a:round/>
               </a:ln>
             </p:spPr>
+            <p:txBody xmlns:a="http://schemas.openxmlformats.org/drawingml/2006/main">
+              <a:bodyPr/>
+              <a:p/>
+            </p:txBody>
           </p:sp>
           <p:sp>
             <p:nvSpPr>
@@ -9473,6 +9633,10 @@
               <a:effectRef xmlns:a="http://schemas.openxmlformats.org/drawingml/2006/main" idx="11"/>
               <a:fontRef xmlns:a="http://schemas.openxmlformats.org/drawingml/2006/main" idx="major"/>
             </p:style>
+            <p:txBody xmlns:a="http://schemas.openxmlformats.org/drawingml/2006/main">
+              <a:bodyPr/>
+              <a:p/>
+            </p:txBody>
           </p:sp>
           <p:sp>
             <p:nvSpPr>
@@ -9520,6 +9684,10 @@
                 <a:round/>
               </a:ln>
             </p:spPr>
+            <p:txBody xmlns:a="http://schemas.openxmlformats.org/drawingml/2006/main">
+              <a:bodyPr/>
+              <a:p/>
+            </p:txBody>
           </p:sp>
           <p:sp>
             <p:nvSpPr>
@@ -9570,6 +9738,10 @@
                 <a:round/>
               </a:ln>
             </p:spPr>
+            <p:txBody xmlns:a="http://schemas.openxmlformats.org/drawingml/2006/main">
+              <a:bodyPr/>
+              <a:p/>
+            </p:txBody>
           </p:sp>
           <p:sp>
             <p:nvSpPr>
@@ -9613,6 +9785,10 @@
                 <a:round/>
               </a:ln>
             </p:spPr>
+            <p:txBody xmlns:a="http://schemas.openxmlformats.org/drawingml/2006/main">
+              <a:bodyPr/>
+              <a:p/>
+            </p:txBody>
           </p:sp>
           <p:sp>
             <p:nvSpPr>
@@ -9663,6 +9839,10 @@
               <a:effectRef xmlns:a="http://schemas.openxmlformats.org/drawingml/2006/main" idx="11"/>
               <a:fontRef xmlns:a="http://schemas.openxmlformats.org/drawingml/2006/main" idx="major"/>
             </p:style>
+            <p:txBody xmlns:a="http://schemas.openxmlformats.org/drawingml/2006/main">
+              <a:bodyPr/>
+              <a:p/>
+            </p:txBody>
           </p:sp>
           <p:sp>
             <p:nvSpPr>
@@ -9710,6 +9890,10 @@
                 <a:round/>
               </a:ln>
             </p:spPr>
+            <p:txBody xmlns:a="http://schemas.openxmlformats.org/drawingml/2006/main">
+              <a:bodyPr/>
+              <a:p/>
+            </p:txBody>
           </p:sp>
           <p:sp>
             <p:nvSpPr>
@@ -9742,6 +9926,10 @@
                 <a:round/>
               </a:ln>
             </p:spPr>
+            <p:txBody xmlns:a="http://schemas.openxmlformats.org/drawingml/2006/main">
+              <a:bodyPr/>
+              <a:p/>
+            </p:txBody>
           </p:sp>
           <p:sp>
             <p:nvSpPr>
@@ -9892,7 +10080,7 @@
                     <a:solidFill>
                       <a:srgbClr val="B76C4D"/>
                     </a:solidFill>
-                    <a:latin typeface="Arial"/>
+                    <a:latin typeface="Times New Roman"/>
                     <a:ea typeface="Arial"/>
                     <a:cs typeface="Arial"/>
                   </a:rPr>
@@ -9956,6 +10144,10 @@
                 <a:round/>
               </a:ln>
             </p:spPr>
+            <p:txBody xmlns:a="http://schemas.openxmlformats.org/drawingml/2006/main">
+              <a:bodyPr/>
+              <a:p/>
+            </p:txBody>
           </p:sp>
           <p:grpSp>
             <p:nvGrpSpPr>
@@ -10036,6 +10228,10 @@
                   <a:round/>
                 </a:ln>
               </p:spPr>
+              <p:txBody xmlns:a="http://schemas.openxmlformats.org/drawingml/2006/main">
+                <a:bodyPr/>
+                <a:p/>
+              </p:txBody>
             </p:sp>
             <p:sp>
               <p:nvSpPr>
@@ -10102,6 +10298,10 @@
                   <a:round/>
                 </a:ln>
               </p:spPr>
+              <p:txBody xmlns:a="http://schemas.openxmlformats.org/drawingml/2006/main">
+                <a:bodyPr/>
+                <a:p/>
+              </p:txBody>
             </p:sp>
             <p:sp>
               <p:nvSpPr>
@@ -10143,6 +10343,10 @@
                   <a:round/>
                 </a:ln>
               </p:spPr>
+              <p:txBody xmlns:a="http://schemas.openxmlformats.org/drawingml/2006/main">
+                <a:bodyPr/>
+                <a:p/>
+              </p:txBody>
             </p:sp>
             <p:sp>
               <p:nvSpPr>
@@ -10184,6 +10388,10 @@
                   <a:round/>
                 </a:ln>
               </p:spPr>
+              <p:txBody xmlns:a="http://schemas.openxmlformats.org/drawingml/2006/main">
+                <a:bodyPr/>
+                <a:p/>
+              </p:txBody>
             </p:sp>
             <p:sp>
               <p:nvSpPr>
@@ -10228,6 +10436,10 @@
                   <a:round/>
                 </a:ln>
               </p:spPr>
+              <p:txBody xmlns:a="http://schemas.openxmlformats.org/drawingml/2006/main">
+                <a:bodyPr/>
+                <a:p/>
+              </p:txBody>
             </p:sp>
             <p:sp>
               <p:nvSpPr>
@@ -10272,6 +10484,10 @@
                   <a:round/>
                 </a:ln>
               </p:spPr>
+              <p:txBody xmlns:a="http://schemas.openxmlformats.org/drawingml/2006/main">
+                <a:bodyPr/>
+                <a:p/>
+              </p:txBody>
             </p:sp>
           </p:grpSp>
           <p:sp>
@@ -10423,7 +10639,7 @@
                     <a:solidFill>
                       <a:srgbClr val="24272A"/>
                     </a:solidFill>
-                    <a:latin typeface="Arial"/>
+                    <a:latin typeface="Times New Roman"/>
                     <a:ea typeface="Arial"/>
                     <a:cs typeface="Arial"/>
                   </a:rPr>
@@ -10478,6 +10694,10 @@
               <a:effectRef xmlns:a="http://schemas.openxmlformats.org/drawingml/2006/main" idx="11"/>
               <a:fontRef xmlns:a="http://schemas.openxmlformats.org/drawingml/2006/main" idx="major"/>
             </p:style>
+            <p:txBody xmlns:a="http://schemas.openxmlformats.org/drawingml/2006/main">
+              <a:bodyPr/>
+              <a:p/>
+            </p:txBody>
           </p:sp>
           <p:sp>
             <p:nvSpPr>
@@ -10525,6 +10745,10 @@
                 <a:round/>
               </a:ln>
             </p:spPr>
+            <p:txBody xmlns:a="http://schemas.openxmlformats.org/drawingml/2006/main">
+              <a:bodyPr/>
+              <a:p/>
+            </p:txBody>
           </p:sp>
           <p:grpSp>
             <p:nvGrpSpPr>
@@ -10605,6 +10829,10 @@
                   <a:round/>
                 </a:ln>
               </p:spPr>
+              <p:txBody xmlns:a="http://schemas.openxmlformats.org/drawingml/2006/main">
+                <a:bodyPr/>
+                <a:p/>
+              </p:txBody>
             </p:sp>
             <p:sp>
               <p:nvSpPr>
@@ -10656,6 +10884,10 @@
                   <a:round/>
                 </a:ln>
               </p:spPr>
+              <p:txBody xmlns:a="http://schemas.openxmlformats.org/drawingml/2006/main">
+                <a:bodyPr/>
+                <a:p/>
+              </p:txBody>
             </p:sp>
             <p:sp>
               <p:nvSpPr>
@@ -10697,6 +10929,10 @@
                   <a:round/>
                 </a:ln>
               </p:spPr>
+              <p:txBody xmlns:a="http://schemas.openxmlformats.org/drawingml/2006/main">
+                <a:bodyPr/>
+                <a:p/>
+              </p:txBody>
             </p:sp>
           </p:grpSp>
           <p:sp>
@@ -10848,7 +11084,7 @@
                     <a:solidFill>
                       <a:srgbClr val="24272A"/>
                     </a:solidFill>
-                    <a:latin typeface="Arial"/>
+                    <a:latin typeface="Times New Roman"/>
                     <a:ea typeface="Arial"/>
                     <a:cs typeface="Arial"/>
                   </a:rPr>
@@ -10903,6 +11139,10 @@
               <a:effectRef xmlns:a="http://schemas.openxmlformats.org/drawingml/2006/main" idx="11"/>
               <a:fontRef xmlns:a="http://schemas.openxmlformats.org/drawingml/2006/main" idx="major"/>
             </p:style>
+            <p:txBody xmlns:a="http://schemas.openxmlformats.org/drawingml/2006/main">
+              <a:bodyPr/>
+              <a:p/>
+            </p:txBody>
           </p:sp>
           <p:sp>
             <p:nvSpPr>
@@ -10950,6 +11190,10 @@
                 <a:round/>
               </a:ln>
             </p:spPr>
+            <p:txBody xmlns:a="http://schemas.openxmlformats.org/drawingml/2006/main">
+              <a:bodyPr/>
+              <a:p/>
+            </p:txBody>
           </p:sp>
           <p:grpSp>
             <p:nvGrpSpPr>
@@ -11005,6 +11249,10 @@
                   <a:round/>
                 </a:ln>
               </p:spPr>
+              <p:txBody xmlns:a="http://schemas.openxmlformats.org/drawingml/2006/main">
+                <a:bodyPr/>
+                <a:p/>
+              </p:txBody>
             </p:sp>
             <p:sp>
               <p:nvSpPr>
@@ -11071,6 +11319,10 @@
                   <a:round/>
                 </a:ln>
               </p:spPr>
+              <p:txBody xmlns:a="http://schemas.openxmlformats.org/drawingml/2006/main">
+                <a:bodyPr/>
+                <a:p/>
+              </p:txBody>
             </p:sp>
             <p:sp>
               <p:nvSpPr>
@@ -11112,6 +11364,10 @@
                   <a:round/>
                 </a:ln>
               </p:spPr>
+              <p:txBody xmlns:a="http://schemas.openxmlformats.org/drawingml/2006/main">
+                <a:bodyPr/>
+                <a:p/>
+              </p:txBody>
             </p:sp>
             <p:sp>
               <p:nvSpPr>
@@ -11153,6 +11409,10 @@
                   <a:round/>
                 </a:ln>
               </p:spPr>
+              <p:txBody xmlns:a="http://schemas.openxmlformats.org/drawingml/2006/main">
+                <a:bodyPr/>
+                <a:p/>
+              </p:txBody>
             </p:sp>
           </p:grpSp>
           <p:sp>
@@ -11304,7 +11564,7 @@
                     <a:solidFill>
                       <a:srgbClr val="24272A"/>
                     </a:solidFill>
-                    <a:latin typeface="Arial"/>
+                    <a:latin typeface="Times New Roman"/>
                     <a:ea typeface="Arial"/>
                     <a:cs typeface="Arial"/>
                   </a:rPr>
@@ -11359,6 +11619,10 @@
               <a:effectRef xmlns:a="http://schemas.openxmlformats.org/drawingml/2006/main" idx="11"/>
               <a:fontRef xmlns:a="http://schemas.openxmlformats.org/drawingml/2006/main" idx="major"/>
             </p:style>
+            <p:txBody xmlns:a="http://schemas.openxmlformats.org/drawingml/2006/main">
+              <a:bodyPr/>
+              <a:p/>
+            </p:txBody>
           </p:sp>
           <p:sp>
             <p:nvSpPr>
@@ -11406,6 +11670,10 @@
                 <a:round/>
               </a:ln>
             </p:spPr>
+            <p:txBody xmlns:a="http://schemas.openxmlformats.org/drawingml/2006/main">
+              <a:bodyPr/>
+              <a:p/>
+            </p:txBody>
           </p:sp>
           <p:grpSp>
             <p:nvGrpSpPr>
@@ -11461,6 +11729,10 @@
                   <a:round/>
                 </a:ln>
               </p:spPr>
+              <p:txBody xmlns:a="http://schemas.openxmlformats.org/drawingml/2006/main">
+                <a:bodyPr/>
+                <a:p/>
+              </p:txBody>
             </p:sp>
             <p:sp>
               <p:nvSpPr>
@@ -11502,6 +11774,10 @@
                   <a:round/>
                 </a:ln>
               </p:spPr>
+              <p:txBody xmlns:a="http://schemas.openxmlformats.org/drawingml/2006/main">
+                <a:bodyPr/>
+                <a:p/>
+              </p:txBody>
             </p:sp>
             <p:sp>
               <p:nvSpPr>
@@ -11543,6 +11819,10 @@
                   <a:round/>
                 </a:ln>
               </p:spPr>
+              <p:txBody xmlns:a="http://schemas.openxmlformats.org/drawingml/2006/main">
+                <a:bodyPr/>
+                <a:p/>
+              </p:txBody>
             </p:sp>
             <p:sp>
               <p:nvSpPr>
@@ -11587,6 +11867,10 @@
                   <a:round/>
                 </a:ln>
               </p:spPr>
+              <p:txBody xmlns:a="http://schemas.openxmlformats.org/drawingml/2006/main">
+                <a:bodyPr/>
+                <a:p/>
+              </p:txBody>
             </p:sp>
           </p:grpSp>
           <p:sp>
@@ -11738,7 +12022,7 @@
                     <a:solidFill>
                       <a:srgbClr val="24272A"/>
                     </a:solidFill>
-                    <a:latin typeface="Arial"/>
+                    <a:latin typeface="Times New Roman"/>
                     <a:ea typeface="Arial"/>
                     <a:cs typeface="Arial"/>
                   </a:rPr>

--- a/artifacts/semantic_revision_20261022/pptx/Figure13_Semantic.pptx
+++ b/artifacts/semantic_revision_20261022/pptx/Figure13_Semantic.pptx
@@ -3654,7 +3654,7 @@
                     <a:solidFill>
                       <a:srgbClr val="24272A"/>
                     </a:solidFill>
-                    <a:latin typeface="Times New Roman"/>
+                    <a:latin typeface="Comic Sans MS"/>
                     <a:ea typeface="Comic Sans MS"/>
                     <a:cs typeface="Comic Sans MS"/>
                   </a:rPr>
@@ -3744,10 +3744,6 @@
                   <a:round/>
                 </a:ln>
               </p:spPr>
-              <p:txBody xmlns:a="http://schemas.openxmlformats.org/drawingml/2006/main">
-                <a:bodyPr/>
-                <a:p/>
-              </p:txBody>
             </p:sp>
             <p:sp>
               <p:nvSpPr>
@@ -3806,10 +3802,6 @@
                   <a:round/>
                 </a:ln>
               </p:spPr>
-              <p:txBody xmlns:a="http://schemas.openxmlformats.org/drawingml/2006/main">
-                <a:bodyPr/>
-                <a:p/>
-              </p:txBody>
             </p:sp>
             <p:sp>
               <p:nvSpPr>
@@ -3851,10 +3843,6 @@
                   <a:round/>
                 </a:ln>
               </p:spPr>
-              <p:txBody xmlns:a="http://schemas.openxmlformats.org/drawingml/2006/main">
-                <a:bodyPr/>
-                <a:p/>
-              </p:txBody>
             </p:sp>
           </p:grpSp>
           <p:sp>
@@ -4006,7 +3994,7 @@
                     <a:solidFill>
                       <a:srgbClr val="24272A"/>
                     </a:solidFill>
-                    <a:latin typeface="Times New Roman"/>
+                    <a:latin typeface="Arial"/>
                     <a:ea typeface="Arial"/>
                     <a:cs typeface="Arial"/>
                   </a:rPr>
@@ -4164,7 +4152,7 @@
                     <a:solidFill>
                       <a:srgbClr val="626A6F"/>
                     </a:solidFill>
-                    <a:latin typeface="Times New Roman"/>
+                    <a:latin typeface="Arial"/>
                     <a:ea typeface="Arial"/>
                     <a:cs typeface="Arial"/>
                   </a:rPr>
@@ -4204,10 +4192,6 @@
                 <a:round/>
               </a:ln>
             </p:spPr>
-            <p:txBody xmlns:a="http://schemas.openxmlformats.org/drawingml/2006/main">
-              <a:bodyPr/>
-              <a:p/>
-            </p:txBody>
           </p:sp>
           <p:sp>
             <p:nvSpPr>
@@ -4252,10 +4236,6 @@
                 <a:round/>
               </a:ln>
             </p:spPr>
-            <p:txBody xmlns:a="http://schemas.openxmlformats.org/drawingml/2006/main">
-              <a:bodyPr/>
-              <a:p/>
-            </p:txBody>
           </p:sp>
           <p:sp>
             <p:nvSpPr>
@@ -4406,7 +4386,7 @@
                     <a:solidFill>
                       <a:srgbClr val="626A6F"/>
                     </a:solidFill>
-                    <a:latin typeface="Times New Roman"/>
+                    <a:latin typeface="Arial"/>
                     <a:ea typeface="Arial"/>
                     <a:cs typeface="Arial"/>
                   </a:rPr>
@@ -4564,7 +4544,7 @@
                     <a:solidFill>
                       <a:srgbClr val="626A6F"/>
                     </a:solidFill>
-                    <a:latin typeface="Times New Roman"/>
+                    <a:latin typeface="Arial"/>
                     <a:ea typeface="Arial"/>
                     <a:cs typeface="Arial"/>
                   </a:rPr>
@@ -4937,10 +4917,6 @@
                 <a:round/>
               </a:ln>
             </p:spPr>
-            <p:txBody xmlns:a="http://schemas.openxmlformats.org/drawingml/2006/main">
-              <a:bodyPr/>
-              <a:p/>
-            </p:txBody>
           </p:sp>
           <p:sp>
             <p:nvSpPr>
@@ -4988,10 +4964,6 @@
                 <a:round/>
               </a:ln>
             </p:spPr>
-            <p:txBody xmlns:a="http://schemas.openxmlformats.org/drawingml/2006/main">
-              <a:bodyPr/>
-              <a:p/>
-            </p:txBody>
           </p:sp>
           <p:sp>
             <p:nvSpPr>
@@ -5142,7 +5114,7 @@
                     <a:solidFill>
                       <a:srgbClr val="626A6F"/>
                     </a:solidFill>
-                    <a:latin typeface="Times New Roman"/>
+                    <a:latin typeface="Arial"/>
                     <a:ea typeface="Arial"/>
                     <a:cs typeface="Arial"/>
                   </a:rPr>
@@ -5197,10 +5169,6 @@
                 <a:round/>
               </a:ln>
             </p:spPr>
-            <p:txBody xmlns:a="http://schemas.openxmlformats.org/drawingml/2006/main">
-              <a:bodyPr/>
-              <a:p/>
-            </p:txBody>
           </p:sp>
           <p:sp>
             <p:nvSpPr>
@@ -5351,7 +5319,7 @@
                     <a:solidFill>
                       <a:srgbClr val="B76C4D"/>
                     </a:solidFill>
-                    <a:latin typeface="Times New Roman"/>
+                    <a:latin typeface="Arial"/>
                     <a:ea typeface="Arial"/>
                     <a:cs typeface="Arial"/>
                   </a:rPr>
@@ -5406,10 +5374,6 @@
                 <a:round/>
               </a:ln>
             </p:spPr>
-            <p:txBody xmlns:a="http://schemas.openxmlformats.org/drawingml/2006/main">
-              <a:bodyPr/>
-              <a:p/>
-            </p:txBody>
           </p:sp>
           <p:sp>
             <p:nvSpPr>
@@ -5560,7 +5524,7 @@
                     <a:solidFill>
                       <a:srgbClr val="626A6F"/>
                     </a:solidFill>
-                    <a:latin typeface="Times New Roman"/>
+                    <a:latin typeface="Arial"/>
                     <a:ea typeface="Arial"/>
                     <a:cs typeface="Arial"/>
                   </a:rPr>
@@ -5718,7 +5682,7 @@
                     <a:solidFill>
                       <a:srgbClr val="626A6F"/>
                     </a:solidFill>
-                    <a:latin typeface="Times New Roman"/>
+                    <a:latin typeface="Arial"/>
                     <a:ea typeface="Arial"/>
                     <a:cs typeface="Arial"/>
                   </a:rPr>
@@ -5891,7 +5855,7 @@
                     <a:solidFill>
                       <a:srgbClr val="24272A"/>
                     </a:solidFill>
-                    <a:latin typeface="Times New Roman"/>
+                    <a:latin typeface="Comic Sans MS"/>
                     <a:ea typeface="Comic Sans MS"/>
                     <a:cs typeface="Comic Sans MS"/>
                   </a:rPr>
@@ -5981,10 +5945,6 @@
                   <a:round/>
                 </a:ln>
               </p:spPr>
-              <p:txBody xmlns:a="http://schemas.openxmlformats.org/drawingml/2006/main">
-                <a:bodyPr/>
-                <a:p/>
-              </p:txBody>
             </p:sp>
             <p:sp>
               <p:nvSpPr>
@@ -6062,10 +6022,6 @@
                   <a:round/>
                 </a:ln>
               </p:spPr>
-              <p:txBody xmlns:a="http://schemas.openxmlformats.org/drawingml/2006/main">
-                <a:bodyPr/>
-                <a:p/>
-              </p:txBody>
             </p:sp>
             <p:sp>
               <p:nvSpPr>
@@ -6134,10 +6090,6 @@
                   <a:round/>
                 </a:ln>
               </p:spPr>
-              <p:txBody xmlns:a="http://schemas.openxmlformats.org/drawingml/2006/main">
-                <a:bodyPr/>
-                <a:p/>
-              </p:txBody>
             </p:sp>
           </p:grpSp>
           <p:sp>
@@ -6289,7 +6241,7 @@
                     <a:solidFill>
                       <a:srgbClr val="24272A"/>
                     </a:solidFill>
-                    <a:latin typeface="Times New Roman"/>
+                    <a:latin typeface="Arial"/>
                     <a:ea typeface="Arial"/>
                     <a:cs typeface="Arial"/>
                   </a:rPr>
@@ -6447,7 +6399,7 @@
                     <a:solidFill>
                       <a:srgbClr val="24272A"/>
                     </a:solidFill>
-                    <a:latin typeface="Times New Roman"/>
+                    <a:latin typeface="Arial"/>
                     <a:ea typeface="Arial"/>
                     <a:cs typeface="Arial"/>
                   </a:rPr>
@@ -6493,10 +6445,6 @@
               <a:effectRef xmlns:a="http://schemas.openxmlformats.org/drawingml/2006/main" idx="10"/>
               <a:fontRef xmlns:a="http://schemas.openxmlformats.org/drawingml/2006/main" idx="major"/>
             </p:style>
-            <p:txBody xmlns:a="http://schemas.openxmlformats.org/drawingml/2006/main">
-              <a:bodyPr/>
-              <a:p/>
-            </p:txBody>
           </p:sp>
           <p:grpSp>
             <p:nvGrpSpPr>
@@ -6565,10 +6513,6 @@
                   <a:round/>
                 </a:ln>
               </p:spPr>
-              <p:txBody xmlns:a="http://schemas.openxmlformats.org/drawingml/2006/main">
-                <a:bodyPr/>
-                <a:p/>
-              </p:txBody>
             </p:sp>
             <p:sp>
               <p:nvSpPr>
@@ -6623,10 +6567,6 @@
                   <a:round/>
                 </a:ln>
               </p:spPr>
-              <p:txBody xmlns:a="http://schemas.openxmlformats.org/drawingml/2006/main">
-                <a:bodyPr/>
-                <a:p/>
-              </p:txBody>
             </p:sp>
             <p:sp>
               <p:nvSpPr>
@@ -6681,10 +6621,6 @@
                   <a:round/>
                 </a:ln>
               </p:spPr>
-              <p:txBody xmlns:a="http://schemas.openxmlformats.org/drawingml/2006/main">
-                <a:bodyPr/>
-                <a:p/>
-              </p:txBody>
             </p:sp>
             <p:sp>
               <p:nvSpPr>
@@ -6739,10 +6675,6 @@
                   <a:round/>
                 </a:ln>
               </p:spPr>
-              <p:txBody xmlns:a="http://schemas.openxmlformats.org/drawingml/2006/main">
-                <a:bodyPr/>
-                <a:p/>
-              </p:txBody>
             </p:sp>
           </p:grpSp>
           <p:sp>
@@ -6894,7 +6826,7 @@
                     <a:solidFill>
                       <a:srgbClr val="24272A"/>
                     </a:solidFill>
-                    <a:latin typeface="Times New Roman"/>
+                    <a:latin typeface="Arial"/>
                     <a:ea typeface="Arial"/>
                     <a:cs typeface="Arial"/>
                   </a:rPr>
@@ -7052,7 +6984,7 @@
                     <a:solidFill>
                       <a:srgbClr val="24272A"/>
                     </a:solidFill>
-                    <a:latin typeface="Times New Roman"/>
+                    <a:latin typeface="Arial"/>
                     <a:ea typeface="Arial"/>
                     <a:cs typeface="Arial"/>
                   </a:rPr>
@@ -7107,10 +7039,6 @@
               <a:effectRef xmlns:a="http://schemas.openxmlformats.org/drawingml/2006/main" idx="11"/>
               <a:fontRef xmlns:a="http://schemas.openxmlformats.org/drawingml/2006/main" idx="major"/>
             </p:style>
-            <p:txBody xmlns:a="http://schemas.openxmlformats.org/drawingml/2006/main">
-              <a:bodyPr/>
-              <a:p/>
-            </p:txBody>
           </p:sp>
           <p:sp>
             <p:nvSpPr>
@@ -7158,10 +7086,6 @@
                 <a:round/>
               </a:ln>
             </p:spPr>
-            <p:txBody xmlns:a="http://schemas.openxmlformats.org/drawingml/2006/main">
-              <a:bodyPr/>
-              <a:p/>
-            </p:txBody>
           </p:sp>
           <p:sp>
             <p:nvSpPr>
@@ -7200,10 +7124,6 @@
               <a:effectRef xmlns:a="http://schemas.openxmlformats.org/drawingml/2006/main" idx="10"/>
               <a:fontRef xmlns:a="http://schemas.openxmlformats.org/drawingml/2006/main" idx="major"/>
             </p:style>
-            <p:txBody xmlns:a="http://schemas.openxmlformats.org/drawingml/2006/main">
-              <a:bodyPr/>
-              <a:p/>
-            </p:txBody>
           </p:sp>
           <p:grpSp>
             <p:nvGrpSpPr>
@@ -7284,10 +7204,6 @@
                   <a:round/>
                 </a:ln>
               </p:spPr>
-              <p:txBody xmlns:a="http://schemas.openxmlformats.org/drawingml/2006/main">
-                <a:bodyPr/>
-                <a:p/>
-              </p:txBody>
             </p:sp>
             <p:sp>
               <p:nvSpPr>
@@ -7381,10 +7297,6 @@
                   <a:round/>
                 </a:ln>
               </p:spPr>
-              <p:txBody xmlns:a="http://schemas.openxmlformats.org/drawingml/2006/main">
-                <a:bodyPr/>
-                <a:p/>
-              </p:txBody>
             </p:sp>
             <p:sp>
               <p:nvSpPr>
@@ -7426,10 +7338,6 @@
                   <a:round/>
                 </a:ln>
               </p:spPr>
-              <p:txBody xmlns:a="http://schemas.openxmlformats.org/drawingml/2006/main">
-                <a:bodyPr/>
-                <a:p/>
-              </p:txBody>
             </p:sp>
             <p:sp>
               <p:nvSpPr>
@@ -7471,10 +7379,6 @@
                   <a:round/>
                 </a:ln>
               </p:spPr>
-              <p:txBody xmlns:a="http://schemas.openxmlformats.org/drawingml/2006/main">
-                <a:bodyPr/>
-                <a:p/>
-              </p:txBody>
             </p:sp>
             <p:sp>
               <p:nvSpPr>
@@ -7516,10 +7420,6 @@
                   <a:round/>
                 </a:ln>
               </p:spPr>
-              <p:txBody xmlns:a="http://schemas.openxmlformats.org/drawingml/2006/main">
-                <a:bodyPr/>
-                <a:p/>
-              </p:txBody>
             </p:sp>
             <p:sp>
               <p:nvSpPr>
@@ -7561,10 +7461,6 @@
                   <a:round/>
                 </a:ln>
               </p:spPr>
-              <p:txBody xmlns:a="http://schemas.openxmlformats.org/drawingml/2006/main">
-                <a:bodyPr/>
-                <a:p/>
-              </p:txBody>
             </p:sp>
           </p:grpSp>
           <p:sp>
@@ -7716,7 +7612,7 @@
                     <a:solidFill>
                       <a:srgbClr val="24272A"/>
                     </a:solidFill>
-                    <a:latin typeface="Times New Roman"/>
+                    <a:latin typeface="Arial"/>
                     <a:ea typeface="Arial"/>
                     <a:cs typeface="Arial"/>
                   </a:rPr>
@@ -7874,7 +7770,7 @@
                     <a:solidFill>
                       <a:srgbClr val="24272A"/>
                     </a:solidFill>
-                    <a:latin typeface="Times New Roman"/>
+                    <a:latin typeface="Arial"/>
                     <a:ea typeface="Arial"/>
                     <a:cs typeface="Arial"/>
                   </a:rPr>
@@ -8047,7 +7943,7 @@
                     <a:solidFill>
                       <a:srgbClr val="24272A"/>
                     </a:solidFill>
-                    <a:latin typeface="Times New Roman"/>
+                    <a:latin typeface="Comic Sans MS"/>
                     <a:ea typeface="Comic Sans MS"/>
                     <a:cs typeface="Comic Sans MS"/>
                   </a:rPr>
@@ -8110,10 +8006,6 @@
                   <a:round/>
                 </a:ln>
               </p:spPr>
-              <p:txBody xmlns:a="http://schemas.openxmlformats.org/drawingml/2006/main">
-                <a:bodyPr/>
-                <a:p/>
-              </p:txBody>
             </p:sp>
             <p:sp>
               <p:nvSpPr>
@@ -8155,10 +8047,6 @@
                   <a:round/>
                 </a:ln>
               </p:spPr>
-              <p:txBody xmlns:a="http://schemas.openxmlformats.org/drawingml/2006/main">
-                <a:bodyPr/>
-                <a:p/>
-              </p:txBody>
             </p:sp>
             <p:sp>
               <p:nvSpPr>
@@ -8200,10 +8088,6 @@
                   <a:round/>
                 </a:ln>
               </p:spPr>
-              <p:txBody xmlns:a="http://schemas.openxmlformats.org/drawingml/2006/main">
-                <a:bodyPr/>
-                <a:p/>
-              </p:txBody>
             </p:sp>
             <p:sp>
               <p:nvSpPr>
@@ -8248,10 +8132,6 @@
                   <a:round/>
                 </a:ln>
               </p:spPr>
-              <p:txBody xmlns:a="http://schemas.openxmlformats.org/drawingml/2006/main">
-                <a:bodyPr/>
-                <a:p/>
-              </p:txBody>
             </p:sp>
           </p:grpSp>
           <p:sp>
@@ -8403,7 +8283,7 @@
                     <a:solidFill>
                       <a:srgbClr val="24272A"/>
                     </a:solidFill>
-                    <a:latin typeface="Times New Roman"/>
+                    <a:latin typeface="Arial"/>
                     <a:ea typeface="Arial"/>
                     <a:cs typeface="Arial"/>
                   </a:rPr>
@@ -8455,10 +8335,6 @@
                 <a:round/>
               </a:ln>
             </p:spPr>
-            <p:txBody xmlns:a="http://schemas.openxmlformats.org/drawingml/2006/main">
-              <a:bodyPr/>
-              <a:p/>
-            </p:txBody>
           </p:sp>
           <p:sp>
             <p:nvSpPr>
@@ -8609,7 +8485,7 @@
                     <a:solidFill>
                       <a:srgbClr val="24272A"/>
                     </a:solidFill>
-                    <a:latin typeface="Times New Roman"/>
+                    <a:latin typeface="Arial"/>
                     <a:ea typeface="Arial"/>
                     <a:cs typeface="Arial"/>
                   </a:rPr>
@@ -8661,10 +8537,6 @@
                 <a:round/>
               </a:ln>
             </p:spPr>
-            <p:txBody xmlns:a="http://schemas.openxmlformats.org/drawingml/2006/main">
-              <a:bodyPr/>
-              <a:p/>
-            </p:txBody>
           </p:sp>
           <p:sp>
             <p:nvSpPr>
@@ -8815,7 +8687,7 @@
                     <a:solidFill>
                       <a:srgbClr val="24272A"/>
                     </a:solidFill>
-                    <a:latin typeface="Times New Roman"/>
+                    <a:latin typeface="Arial"/>
                     <a:ea typeface="Arial"/>
                     <a:cs typeface="Arial"/>
                   </a:rPr>
@@ -8864,10 +8736,6 @@
                 <a:round/>
               </a:ln>
             </p:spPr>
-            <p:txBody xmlns:a="http://schemas.openxmlformats.org/drawingml/2006/main">
-              <a:bodyPr/>
-              <a:p/>
-            </p:txBody>
           </p:sp>
           <p:sp>
             <p:nvSpPr>
@@ -9018,7 +8886,7 @@
                     <a:solidFill>
                       <a:srgbClr val="328372"/>
                     </a:solidFill>
-                    <a:latin typeface="Times New Roman"/>
+                    <a:latin typeface="Arial"/>
                     <a:ea typeface="Arial"/>
                     <a:cs typeface="Arial"/>
                   </a:rPr>
@@ -9073,10 +8941,6 @@
               <a:effectRef xmlns:a="http://schemas.openxmlformats.org/drawingml/2006/main" idx="11"/>
               <a:fontRef xmlns:a="http://schemas.openxmlformats.org/drawingml/2006/main" idx="major"/>
             </p:style>
-            <p:txBody xmlns:a="http://schemas.openxmlformats.org/drawingml/2006/main">
-              <a:bodyPr/>
-              <a:p/>
-            </p:txBody>
           </p:sp>
           <p:sp>
             <p:nvSpPr>
@@ -9124,10 +8988,6 @@
                 <a:round/>
               </a:ln>
             </p:spPr>
-            <p:txBody xmlns:a="http://schemas.openxmlformats.org/drawingml/2006/main">
-              <a:bodyPr/>
-              <a:p/>
-            </p:txBody>
           </p:sp>
           <p:sp>
             <p:nvSpPr>
@@ -9166,10 +9026,6 @@
               <a:effectRef xmlns:a="http://schemas.openxmlformats.org/drawingml/2006/main" idx="10"/>
               <a:fontRef xmlns:a="http://schemas.openxmlformats.org/drawingml/2006/main" idx="major"/>
             </p:style>
-            <p:txBody xmlns:a="http://schemas.openxmlformats.org/drawingml/2006/main">
-              <a:bodyPr/>
-              <a:p/>
-            </p:txBody>
           </p:sp>
           <p:grpSp>
             <p:nvGrpSpPr>
@@ -9252,10 +9108,6 @@
                   <a:round/>
                 </a:ln>
               </p:spPr>
-              <p:txBody xmlns:a="http://schemas.openxmlformats.org/drawingml/2006/main">
-                <a:bodyPr/>
-                <a:p/>
-              </p:txBody>
             </p:sp>
             <p:sp>
               <p:nvSpPr>
@@ -9300,10 +9152,6 @@
                   <a:round/>
                 </a:ln>
               </p:spPr>
-              <p:txBody xmlns:a="http://schemas.openxmlformats.org/drawingml/2006/main">
-                <a:bodyPr/>
-                <a:p/>
-              </p:txBody>
             </p:sp>
           </p:grpSp>
           <p:sp>
@@ -9455,7 +9303,7 @@
                     <a:solidFill>
                       <a:srgbClr val="328372"/>
                     </a:solidFill>
-                    <a:latin typeface="Times New Roman"/>
+                    <a:latin typeface="Arial"/>
                     <a:ea typeface="Arial"/>
                     <a:cs typeface="Arial"/>
                   </a:rPr>
@@ -9525,10 +9373,6 @@
               <a:effectRef xmlns:a="http://schemas.openxmlformats.org/drawingml/2006/main" idx="11"/>
               <a:fontRef xmlns:a="http://schemas.openxmlformats.org/drawingml/2006/main" idx="major"/>
             </p:style>
-            <p:txBody xmlns:a="http://schemas.openxmlformats.org/drawingml/2006/main">
-              <a:bodyPr/>
-              <a:p/>
-            </p:txBody>
           </p:sp>
           <p:sp>
             <p:nvSpPr>
@@ -9576,10 +9420,6 @@
                 <a:round/>
               </a:ln>
             </p:spPr>
-            <p:txBody xmlns:a="http://schemas.openxmlformats.org/drawingml/2006/main">
-              <a:bodyPr/>
-              <a:p/>
-            </p:txBody>
           </p:sp>
           <p:sp>
             <p:nvSpPr>
@@ -9633,10 +9473,6 @@
               <a:effectRef xmlns:a="http://schemas.openxmlformats.org/drawingml/2006/main" idx="11"/>
               <a:fontRef xmlns:a="http://schemas.openxmlformats.org/drawingml/2006/main" idx="major"/>
             </p:style>
-            <p:txBody xmlns:a="http://schemas.openxmlformats.org/drawingml/2006/main">
-              <a:bodyPr/>
-              <a:p/>
-            </p:txBody>
           </p:sp>
           <p:sp>
             <p:nvSpPr>
@@ -9684,10 +9520,6 @@
                 <a:round/>
               </a:ln>
             </p:spPr>
-            <p:txBody xmlns:a="http://schemas.openxmlformats.org/drawingml/2006/main">
-              <a:bodyPr/>
-              <a:p/>
-            </p:txBody>
           </p:sp>
           <p:sp>
             <p:nvSpPr>
@@ -9738,10 +9570,6 @@
                 <a:round/>
               </a:ln>
             </p:spPr>
-            <p:txBody xmlns:a="http://schemas.openxmlformats.org/drawingml/2006/main">
-              <a:bodyPr/>
-              <a:p/>
-            </p:txBody>
           </p:sp>
           <p:sp>
             <p:nvSpPr>
@@ -9785,10 +9613,6 @@
                 <a:round/>
               </a:ln>
             </p:spPr>
-            <p:txBody xmlns:a="http://schemas.openxmlformats.org/drawingml/2006/main">
-              <a:bodyPr/>
-              <a:p/>
-            </p:txBody>
           </p:sp>
           <p:sp>
             <p:nvSpPr>
@@ -9839,10 +9663,6 @@
               <a:effectRef xmlns:a="http://schemas.openxmlformats.org/drawingml/2006/main" idx="11"/>
               <a:fontRef xmlns:a="http://schemas.openxmlformats.org/drawingml/2006/main" idx="major"/>
             </p:style>
-            <p:txBody xmlns:a="http://schemas.openxmlformats.org/drawingml/2006/main">
-              <a:bodyPr/>
-              <a:p/>
-            </p:txBody>
           </p:sp>
           <p:sp>
             <p:nvSpPr>
@@ -9890,10 +9710,6 @@
                 <a:round/>
               </a:ln>
             </p:spPr>
-            <p:txBody xmlns:a="http://schemas.openxmlformats.org/drawingml/2006/main">
-              <a:bodyPr/>
-              <a:p/>
-            </p:txBody>
           </p:sp>
           <p:sp>
             <p:nvSpPr>
@@ -9926,10 +9742,6 @@
                 <a:round/>
               </a:ln>
             </p:spPr>
-            <p:txBody xmlns:a="http://schemas.openxmlformats.org/drawingml/2006/main">
-              <a:bodyPr/>
-              <a:p/>
-            </p:txBody>
           </p:sp>
           <p:sp>
             <p:nvSpPr>
@@ -10080,7 +9892,7 @@
                     <a:solidFill>
                       <a:srgbClr val="B76C4D"/>
                     </a:solidFill>
-                    <a:latin typeface="Times New Roman"/>
+                    <a:latin typeface="Arial"/>
                     <a:ea typeface="Arial"/>
                     <a:cs typeface="Arial"/>
                   </a:rPr>
@@ -10144,10 +9956,6 @@
                 <a:round/>
               </a:ln>
             </p:spPr>
-            <p:txBody xmlns:a="http://schemas.openxmlformats.org/drawingml/2006/main">
-              <a:bodyPr/>
-              <a:p/>
-            </p:txBody>
           </p:sp>
           <p:grpSp>
             <p:nvGrpSpPr>
@@ -10228,10 +10036,6 @@
                   <a:round/>
                 </a:ln>
               </p:spPr>
-              <p:txBody xmlns:a="http://schemas.openxmlformats.org/drawingml/2006/main">
-                <a:bodyPr/>
-                <a:p/>
-              </p:txBody>
             </p:sp>
             <p:sp>
               <p:nvSpPr>
@@ -10298,10 +10102,6 @@
                   <a:round/>
                 </a:ln>
               </p:spPr>
-              <p:txBody xmlns:a="http://schemas.openxmlformats.org/drawingml/2006/main">
-                <a:bodyPr/>
-                <a:p/>
-              </p:txBody>
             </p:sp>
             <p:sp>
               <p:nvSpPr>
@@ -10343,10 +10143,6 @@
                   <a:round/>
                 </a:ln>
               </p:spPr>
-              <p:txBody xmlns:a="http://schemas.openxmlformats.org/drawingml/2006/main">
-                <a:bodyPr/>
-                <a:p/>
-              </p:txBody>
             </p:sp>
             <p:sp>
               <p:nvSpPr>
@@ -10388,10 +10184,6 @@
                   <a:round/>
                 </a:ln>
               </p:spPr>
-              <p:txBody xmlns:a="http://schemas.openxmlformats.org/drawingml/2006/main">
-                <a:bodyPr/>
-                <a:p/>
-              </p:txBody>
             </p:sp>
             <p:sp>
               <p:nvSpPr>
@@ -10436,10 +10228,6 @@
                   <a:round/>
                 </a:ln>
               </p:spPr>
-              <p:txBody xmlns:a="http://schemas.openxmlformats.org/drawingml/2006/main">
-                <a:bodyPr/>
-                <a:p/>
-              </p:txBody>
             </p:sp>
             <p:sp>
               <p:nvSpPr>
@@ -10484,10 +10272,6 @@
                   <a:round/>
                 </a:ln>
               </p:spPr>
-              <p:txBody xmlns:a="http://schemas.openxmlformats.org/drawingml/2006/main">
-                <a:bodyPr/>
-                <a:p/>
-              </p:txBody>
             </p:sp>
           </p:grpSp>
           <p:sp>
@@ -10639,7 +10423,7 @@
                     <a:solidFill>
                       <a:srgbClr val="24272A"/>
                     </a:solidFill>
-                    <a:latin typeface="Times New Roman"/>
+                    <a:latin typeface="Arial"/>
                     <a:ea typeface="Arial"/>
                     <a:cs typeface="Arial"/>
                   </a:rPr>
@@ -10694,10 +10478,6 @@
               <a:effectRef xmlns:a="http://schemas.openxmlformats.org/drawingml/2006/main" idx="11"/>
               <a:fontRef xmlns:a="http://schemas.openxmlformats.org/drawingml/2006/main" idx="major"/>
             </p:style>
-            <p:txBody xmlns:a="http://schemas.openxmlformats.org/drawingml/2006/main">
-              <a:bodyPr/>
-              <a:p/>
-            </p:txBody>
           </p:sp>
           <p:sp>
             <p:nvSpPr>
@@ -10745,10 +10525,6 @@
                 <a:round/>
               </a:ln>
             </p:spPr>
-            <p:txBody xmlns:a="http://schemas.openxmlformats.org/drawingml/2006/main">
-              <a:bodyPr/>
-              <a:p/>
-            </p:txBody>
           </p:sp>
           <p:grpSp>
             <p:nvGrpSpPr>
@@ -10829,10 +10605,6 @@
                   <a:round/>
                 </a:ln>
               </p:spPr>
-              <p:txBody xmlns:a="http://schemas.openxmlformats.org/drawingml/2006/main">
-                <a:bodyPr/>
-                <a:p/>
-              </p:txBody>
             </p:sp>
             <p:sp>
               <p:nvSpPr>
@@ -10884,10 +10656,6 @@
                   <a:round/>
                 </a:ln>
               </p:spPr>
-              <p:txBody xmlns:a="http://schemas.openxmlformats.org/drawingml/2006/main">
-                <a:bodyPr/>
-                <a:p/>
-              </p:txBody>
             </p:sp>
             <p:sp>
               <p:nvSpPr>
@@ -10929,10 +10697,6 @@
                   <a:round/>
                 </a:ln>
               </p:spPr>
-              <p:txBody xmlns:a="http://schemas.openxmlformats.org/drawingml/2006/main">
-                <a:bodyPr/>
-                <a:p/>
-              </p:txBody>
             </p:sp>
           </p:grpSp>
           <p:sp>
@@ -11084,7 +10848,7 @@
                     <a:solidFill>
                       <a:srgbClr val="24272A"/>
                     </a:solidFill>
-                    <a:latin typeface="Times New Roman"/>
+                    <a:latin typeface="Arial"/>
                     <a:ea typeface="Arial"/>
                     <a:cs typeface="Arial"/>
                   </a:rPr>
@@ -11139,10 +10903,6 @@
               <a:effectRef xmlns:a="http://schemas.openxmlformats.org/drawingml/2006/main" idx="11"/>
               <a:fontRef xmlns:a="http://schemas.openxmlformats.org/drawingml/2006/main" idx="major"/>
             </p:style>
-            <p:txBody xmlns:a="http://schemas.openxmlformats.org/drawingml/2006/main">
-              <a:bodyPr/>
-              <a:p/>
-            </p:txBody>
           </p:sp>
           <p:sp>
             <p:nvSpPr>
@@ -11190,10 +10950,6 @@
                 <a:round/>
               </a:ln>
             </p:spPr>
-            <p:txBody xmlns:a="http://schemas.openxmlformats.org/drawingml/2006/main">
-              <a:bodyPr/>
-              <a:p/>
-            </p:txBody>
           </p:sp>
           <p:grpSp>
             <p:nvGrpSpPr>
@@ -11249,10 +11005,6 @@
                   <a:round/>
                 </a:ln>
               </p:spPr>
-              <p:txBody xmlns:a="http://schemas.openxmlformats.org/drawingml/2006/main">
-                <a:bodyPr/>
-                <a:p/>
-              </p:txBody>
             </p:sp>
             <p:sp>
               <p:nvSpPr>
@@ -11319,10 +11071,6 @@
                   <a:round/>
                 </a:ln>
               </p:spPr>
-              <p:txBody xmlns:a="http://schemas.openxmlformats.org/drawingml/2006/main">
-                <a:bodyPr/>
-                <a:p/>
-              </p:txBody>
             </p:sp>
             <p:sp>
               <p:nvSpPr>
@@ -11364,10 +11112,6 @@
                   <a:round/>
                 </a:ln>
               </p:spPr>
-              <p:txBody xmlns:a="http://schemas.openxmlformats.org/drawingml/2006/main">
-                <a:bodyPr/>
-                <a:p/>
-              </p:txBody>
             </p:sp>
             <p:sp>
               <p:nvSpPr>
@@ -11409,10 +11153,6 @@
                   <a:round/>
                 </a:ln>
               </p:spPr>
-              <p:txBody xmlns:a="http://schemas.openxmlformats.org/drawingml/2006/main">
-                <a:bodyPr/>
-                <a:p/>
-              </p:txBody>
             </p:sp>
           </p:grpSp>
           <p:sp>
@@ -11564,7 +11304,7 @@
                     <a:solidFill>
                       <a:srgbClr val="24272A"/>
                     </a:solidFill>
-                    <a:latin typeface="Times New Roman"/>
+                    <a:latin typeface="Arial"/>
                     <a:ea typeface="Arial"/>
                     <a:cs typeface="Arial"/>
                   </a:rPr>
@@ -11619,10 +11359,6 @@
               <a:effectRef xmlns:a="http://schemas.openxmlformats.org/drawingml/2006/main" idx="11"/>
               <a:fontRef xmlns:a="http://schemas.openxmlformats.org/drawingml/2006/main" idx="major"/>
             </p:style>
-            <p:txBody xmlns:a="http://schemas.openxmlformats.org/drawingml/2006/main">
-              <a:bodyPr/>
-              <a:p/>
-            </p:txBody>
           </p:sp>
           <p:sp>
             <p:nvSpPr>
@@ -11670,10 +11406,6 @@
                 <a:round/>
               </a:ln>
             </p:spPr>
-            <p:txBody xmlns:a="http://schemas.openxmlformats.org/drawingml/2006/main">
-              <a:bodyPr/>
-              <a:p/>
-            </p:txBody>
           </p:sp>
           <p:grpSp>
             <p:nvGrpSpPr>
@@ -11729,10 +11461,6 @@
                   <a:round/>
                 </a:ln>
               </p:spPr>
-              <p:txBody xmlns:a="http://schemas.openxmlformats.org/drawingml/2006/main">
-                <a:bodyPr/>
-                <a:p/>
-              </p:txBody>
             </p:sp>
             <p:sp>
               <p:nvSpPr>
@@ -11774,10 +11502,6 @@
                   <a:round/>
                 </a:ln>
               </p:spPr>
-              <p:txBody xmlns:a="http://schemas.openxmlformats.org/drawingml/2006/main">
-                <a:bodyPr/>
-                <a:p/>
-              </p:txBody>
             </p:sp>
             <p:sp>
               <p:nvSpPr>
@@ -11819,10 +11543,6 @@
                   <a:round/>
                 </a:ln>
               </p:spPr>
-              <p:txBody xmlns:a="http://schemas.openxmlformats.org/drawingml/2006/main">
-                <a:bodyPr/>
-                <a:p/>
-              </p:txBody>
             </p:sp>
             <p:sp>
               <p:nvSpPr>
@@ -11867,10 +11587,6 @@
                   <a:round/>
                 </a:ln>
               </p:spPr>
-              <p:txBody xmlns:a="http://schemas.openxmlformats.org/drawingml/2006/main">
-                <a:bodyPr/>
-                <a:p/>
-              </p:txBody>
             </p:sp>
           </p:grpSp>
           <p:sp>
@@ -12022,7 +11738,7 @@
                     <a:solidFill>
                       <a:srgbClr val="24272A"/>
                     </a:solidFill>
-                    <a:latin typeface="Times New Roman"/>
+                    <a:latin typeface="Arial"/>
                     <a:ea typeface="Arial"/>
                     <a:cs typeface="Arial"/>
                   </a:rPr>
